--- a/dist/초4/사회·역사/경제와참여/초4_사회·역사_경제와참여_02_교환과교류_학생용.pptx
+++ b/dist/초4/사회·역사/경제와참여/초4_사회·역사_경제와참여_02_교환과교류_학생용.pptx
@@ -121,13 +121,13 @@
   <p:extLst>
     <p:ext uri="{521415D9-36F7-43E2-AB2F-B90AF26B5E84}">
       <p14:sectionLst xmlns:p14="http://schemas.microsoft.com/office/powerpoint/2010/main">
-        <p14:section name="도입" id="{14f29455-d063-a963-471e-278121341115}">
+        <p14:section name="도입" id="{7c296076-efc6-cdef-1f64-4ac31eb8e303}">
           <p14:sldIdLst>
             <p14:sldId id="256"/>
             <p14:sldId id="257"/>
           </p14:sldIdLst>
         </p14:section>
-        <p14:section name="개념" id="{b1688a35-c680-2d76-3f7f-68080e7bcd09}">
+        <p14:section name="개념" id="{e679e3d3-f02e-08cf-e090-9c273b58c395}">
           <p14:sldIdLst>
             <p14:sldId id="258"/>
             <p14:sldId id="260"/>
@@ -136,7 +136,7 @@
             <p14:sldId id="266"/>
           </p14:sldIdLst>
         </p14:section>
-        <p14:section name="연습" id="{d9edb70b-c3e6-d290-2ac9-e0bff70528ad}">
+        <p14:section name="연습" id="{a8270ea0-ea8e-5817-fa7d-97939418b9f2}">
           <p14:sldIdLst>
             <p14:sldId id="259"/>
             <p14:sldId id="261"/>
@@ -144,39 +144,39 @@
             <p14:sldId id="267"/>
           </p14:sldIdLst>
         </p14:section>
-        <p14:section name="개념" id="{08ce4138-2f37-a181-b7f0-7be04c0f37b0}">
+        <p14:section name="개념" id="{be7cc0d3-5771-72e2-3a5e-01a774ba638a}">
           <p14:sldIdLst/>
         </p14:section>
-        <p14:section name="연습" id="{51aa6757-3779-39b6-c1ad-a1ef1d53a8a7}">
+        <p14:section name="연습" id="{874deb89-cf47-dab5-a576-c22ccc3ce614}">
           <p14:sldIdLst/>
         </p14:section>
-        <p14:section name="개념" id="{06464e4b-9620-ad76-3006-5b04082ce1cd}">
+        <p14:section name="개념" id="{a3f5e889-639b-67b9-baa4-7ff6230c420c}">
           <p14:sldIdLst/>
         </p14:section>
-        <p14:section name="연습" id="{a81cb81a-f085-04b1-3e46-c3c6eb55ee43}">
+        <p14:section name="연습" id="{ee7d3687-f656-280b-3903-82442184c167}">
           <p14:sldIdLst/>
         </p14:section>
-        <p14:section name="확인" id="{6649995b-703e-d370-5b5d-4ee491d6d323}">
+        <p14:section name="확인" id="{173abcef-80a0-9afd-9ad6-4a8d8102a2b8}">
           <p14:sldIdLst>
             <p14:sldId id="265"/>
             <p14:sldId id="268"/>
           </p14:sldIdLst>
         </p14:section>
-        <p14:section name="개념" id="{25ec9269-07dd-dce4-94e3-55f6069b39c6}">
+        <p14:section name="개념" id="{1a21bceb-35c4-dc82-c803-c50dd4157008}">
           <p14:sldIdLst/>
         </p14:section>
-        <p14:section name="연습" id="{a6805c41-a5b4-ddb3-9271-47f81ec77d6b}">
+        <p14:section name="연습" id="{d206b86d-4200-b6f0-78fa-c055da3e8d8c}">
           <p14:sldIdLst/>
         </p14:section>
-        <p14:section name="확인" id="{ceab4ada-e6b8-cf79-c367-9363898a788e}">
+        <p14:section name="확인" id="{171be228-2e0b-3c82-eb94-a29affbf72f0}">
           <p14:sldIdLst/>
         </p14:section>
-        <p14:section name="정리" id="{2129edc4-868b-af4b-5e1e-7fb4ae07d1f5}">
+        <p14:section name="정리" id="{4f2815fc-5f9f-c6d9-603f-bbf37fcc4072}">
           <p14:sldIdLst>
             <p14:sldId id="269"/>
           </p14:sldIdLst>
         </p14:section>
-        <p14:section name="보충" id="{c6848db1-46a1-aa5c-b64e-d5a56ea0886a}">
+        <p14:section name="보충" id="{0db6caea-8a4f-86e7-321d-7724c2509fcc}">
           <p14:sldIdLst>
             <p14:sldId id="270"/>
           </p14:sldIdLst>
